--- a/cours/Dialogues_TICE/Presentations_PPTX/TICE Niveau 1 - Introduction to ICT (Grok)/Dialogue_13_Why_do_English_students_study_TICE.pptx
+++ b/cours/Dialogues_TICE/Presentations_PPTX/TICE Niveau 1 - Introduction to ICT (Grok)/Dialogue_13_Why_do_English_students_study_TICE.pptx
@@ -2842,7 +2842,7 @@
           <a:solidFill>
             <a:schemeClr val="tx1"/>
           </a:solidFill>
-          <a:latin typeface="+mj-lt"/>
+          <a:latin typeface="Poppins"/>
           <a:ea typeface="+mj-ea"/>
           <a:cs typeface="+mj-cs"/>
         </a:defRPr>
@@ -2859,7 +2859,7 @@
           <a:solidFill>
             <a:schemeClr val="tx1"/>
           </a:solidFill>
-          <a:latin typeface="+mn-lt"/>
+          <a:latin typeface="Poppins"/>
           <a:ea typeface="+mn-ea"/>
           <a:cs typeface="+mn-cs"/>
         </a:defRPr>
@@ -2874,7 +2874,7 @@
           <a:solidFill>
             <a:schemeClr val="tx1"/>
           </a:solidFill>
-          <a:latin typeface="+mn-lt"/>
+          <a:latin typeface="Poppins"/>
           <a:ea typeface="+mn-ea"/>
           <a:cs typeface="+mn-cs"/>
         </a:defRPr>
@@ -2889,7 +2889,7 @@
           <a:solidFill>
             <a:schemeClr val="tx1"/>
           </a:solidFill>
-          <a:latin typeface="+mn-lt"/>
+          <a:latin typeface="Poppins"/>
           <a:ea typeface="+mn-ea"/>
           <a:cs typeface="+mn-cs"/>
         </a:defRPr>
@@ -2904,7 +2904,7 @@
           <a:solidFill>
             <a:schemeClr val="tx1"/>
           </a:solidFill>
-          <a:latin typeface="+mn-lt"/>
+          <a:latin typeface="Poppins"/>
           <a:ea typeface="+mn-ea"/>
           <a:cs typeface="+mn-cs"/>
         </a:defRPr>
@@ -2919,7 +2919,7 @@
           <a:solidFill>
             <a:schemeClr val="tx1"/>
           </a:solidFill>
-          <a:latin typeface="+mn-lt"/>
+          <a:latin typeface="Poppins"/>
           <a:ea typeface="+mn-ea"/>
           <a:cs typeface="+mn-cs"/>
         </a:defRPr>
@@ -2934,7 +2934,7 @@
           <a:solidFill>
             <a:schemeClr val="tx1"/>
           </a:solidFill>
-          <a:latin typeface="+mn-lt"/>
+          <a:latin typeface="Poppins"/>
           <a:ea typeface="+mn-ea"/>
           <a:cs typeface="+mn-cs"/>
         </a:defRPr>
@@ -2949,7 +2949,7 @@
           <a:solidFill>
             <a:schemeClr val="tx1"/>
           </a:solidFill>
-          <a:latin typeface="+mn-lt"/>
+          <a:latin typeface="Poppins"/>
           <a:ea typeface="+mn-ea"/>
           <a:cs typeface="+mn-cs"/>
         </a:defRPr>
@@ -2964,7 +2964,7 @@
           <a:solidFill>
             <a:schemeClr val="tx1"/>
           </a:solidFill>
-          <a:latin typeface="+mn-lt"/>
+          <a:latin typeface="Poppins"/>
           <a:ea typeface="+mn-ea"/>
           <a:cs typeface="+mn-cs"/>
         </a:defRPr>
@@ -2979,7 +2979,7 @@
           <a:solidFill>
             <a:schemeClr val="tx1"/>
           </a:solidFill>
-          <a:latin typeface="+mn-lt"/>
+          <a:latin typeface="Poppins"/>
           <a:ea typeface="+mn-ea"/>
           <a:cs typeface="+mn-cs"/>
         </a:defRPr>
@@ -2994,7 +2994,7 @@
           <a:solidFill>
             <a:schemeClr val="tx1"/>
           </a:solidFill>
-          <a:latin typeface="+mn-lt"/>
+          <a:latin typeface="Poppins"/>
           <a:ea typeface="+mn-ea"/>
           <a:cs typeface="+mn-cs"/>
         </a:defRPr>
@@ -3004,7 +3004,7 @@
           <a:solidFill>
             <a:schemeClr val="tx1"/>
           </a:solidFill>
-          <a:latin typeface="+mn-lt"/>
+          <a:latin typeface="Poppins"/>
           <a:ea typeface="+mn-ea"/>
           <a:cs typeface="+mn-cs"/>
         </a:defRPr>
@@ -3014,7 +3014,7 @@
           <a:solidFill>
             <a:schemeClr val="tx1"/>
           </a:solidFill>
-          <a:latin typeface="+mn-lt"/>
+          <a:latin typeface="Poppins"/>
           <a:ea typeface="+mn-ea"/>
           <a:cs typeface="+mn-cs"/>
         </a:defRPr>
@@ -3024,7 +3024,7 @@
           <a:solidFill>
             <a:schemeClr val="tx1"/>
           </a:solidFill>
-          <a:latin typeface="+mn-lt"/>
+          <a:latin typeface="Poppins"/>
           <a:ea typeface="+mn-ea"/>
           <a:cs typeface="+mn-cs"/>
         </a:defRPr>
@@ -3034,7 +3034,7 @@
           <a:solidFill>
             <a:schemeClr val="tx1"/>
           </a:solidFill>
-          <a:latin typeface="+mn-lt"/>
+          <a:latin typeface="Poppins"/>
           <a:ea typeface="+mn-ea"/>
           <a:cs typeface="+mn-cs"/>
         </a:defRPr>
@@ -3044,7 +3044,7 @@
           <a:solidFill>
             <a:schemeClr val="tx1"/>
           </a:solidFill>
-          <a:latin typeface="+mn-lt"/>
+          <a:latin typeface="Poppins"/>
           <a:ea typeface="+mn-ea"/>
           <a:cs typeface="+mn-cs"/>
         </a:defRPr>
@@ -3054,7 +3054,7 @@
           <a:solidFill>
             <a:schemeClr val="tx1"/>
           </a:solidFill>
-          <a:latin typeface="+mn-lt"/>
+          <a:latin typeface="Poppins"/>
           <a:ea typeface="+mn-ea"/>
           <a:cs typeface="+mn-cs"/>
         </a:defRPr>
@@ -3064,7 +3064,7 @@
           <a:solidFill>
             <a:schemeClr val="tx1"/>
           </a:solidFill>
-          <a:latin typeface="+mn-lt"/>
+          <a:latin typeface="Poppins"/>
           <a:ea typeface="+mn-ea"/>
           <a:cs typeface="+mn-cs"/>
         </a:defRPr>
@@ -3074,7 +3074,7 @@
           <a:solidFill>
             <a:schemeClr val="tx1"/>
           </a:solidFill>
-          <a:latin typeface="+mn-lt"/>
+          <a:latin typeface="Poppins"/>
           <a:ea typeface="+mn-ea"/>
           <a:cs typeface="+mn-cs"/>
         </a:defRPr>
@@ -3089,9 +3089,7 @@
   <p:cSld>
     <p:bg>
       <p:bgPr>
-        <a:solidFill>
-          <a:srgbClr val="1A5C33"/>
-        </a:solidFill>
+        <a:solidFill>val="006847"/&gt;</a:solidFill>
         <a:effectLst/>
       </p:bgPr>
     </p:bg>
@@ -3126,10 +3124,8 @@
           <a:p>
             <a:pPr algn="ctr">
               <a:defRPr sz="3200" b="1">
-                <a:solidFill>
-                  <a:srgbClr val="FFFFFF"/>
-                </a:solidFill>
-                <a:latin typeface="Calibri"/>
+                <a:solidFill>val="FFFFFF"/&gt;</a:solidFill>
+                <a:latin typeface="Poppins"/>
               </a:defRPr>
             </a:pPr>
             <a:r>
@@ -3162,10 +3158,8 @@
           <a:p>
             <a:pPr algn="ctr">
               <a:defRPr sz="2000" b="0">
-                <a:solidFill>
-                  <a:srgbClr val="C5D9C7"/>
-                </a:solidFill>
-                <a:latin typeface="Calibri"/>
+                <a:solidFill>val="DFE5EA"/&gt;</a:solidFill>
+                <a:latin typeface="Poppins"/>
               </a:defRPr>
             </a:pPr>
             <a:r>
@@ -3198,10 +3192,8 @@
           <a:p>
             <a:pPr algn="ctr">
               <a:defRPr sz="1400" b="0">
-                <a:solidFill>
-                  <a:srgbClr val="A0C0A8"/>
-                </a:solidFill>
-                <a:latin typeface="Calibri"/>
+                <a:solidFill>val="B7C9BE"/&gt;</a:solidFill>
+                <a:latin typeface="Poppins"/>
               </a:defRPr>
             </a:pPr>
             <a:r>
@@ -3234,14 +3226,53 @@
           <a:p>
             <a:pPr algn="ctr">
               <a:defRPr sz="1200" b="0">
+                <a:solidFill>val="93B39E"/&gt;</a:solidFill>
+                <a:latin typeface="Poppins"/>
+              </a:defRPr>
+            </a:pPr>
+            <a:r>
+              <a:t>Dialogue 13 / 21</a:t>
+            </a:r>
+          </a:p>
+        </p:txBody>
+      </p:sp>
+      <p:sp>
+        <p:nvSpPr>
+          <p:cNvPr id="990001" name="Pied de page FLE"/>
+          <p:cNvSpPr>
+            <a:spLocks noGrp="1"/>
+          </p:cNvSpPr>
+          <p:nvPr/>
+        </p:nvSpPr>
+        <p:spPr>
+          <a:xfrm>
+            <a:off x="2880360" y="640080"/>
+            <a:ext cx="4572000" cy="274320"/>
+          </a:xfrm>
+          <a:prstGeom prst="rect">
+            <a:avLst/>
+          </a:prstGeom>
+        </p:spPr>
+        <p:txBody>
+          <a:bodyPr anchor="b"/>
+          <a:lstStyle/>
+          <a:p>
+            <a:pPr algn="r">
+              <a:defRPr sz="900">
                 <a:solidFill>
-                  <a:srgbClr val="80B088"/>
+                  <a:srgbClr val="9AA7B6"/>
                 </a:solidFill>
-                <a:latin typeface="Calibri"/>
+                <a:latin typeface="Poppins"/>
               </a:defRPr>
             </a:pPr>
             <a:r>
-              <a:t>Dialogue 13 / 21</a:t>
+              <a:rPr lang="fr-FR" sz="900">
+                <a:solidFill>
+                  <a:srgbClr val="9AA7B6"/>
+                </a:solidFill>
+                <a:latin typeface="Poppins"/>
+              </a:rPr>
+              <a:t>Université de Mostaganem — Dr. Madani BELACEL</a:t>
             </a:r>
           </a:p>
         </p:txBody>
@@ -3259,9 +3290,7 @@
   <p:cSld>
     <p:bg>
       <p:bgPr>
-        <a:solidFill>
-          <a:srgbClr val="FFFFFF"/>
-        </a:solidFill>
+        <a:solidFill>val="FFFFFF"/&gt;</a:solidFill>
         <a:effectLst/>
       </p:bgPr>
     </p:bg>
@@ -3286,9 +3315,7 @@
           <a:prstGeom prst="rect">
             <a:avLst/>
           </a:prstGeom>
-          <a:solidFill>
-            <a:srgbClr val="2C6E49"/>
-          </a:solidFill>
+          <a:solidFill>val="00875B"/&gt;</a:solidFill>
           <a:ln>
             <a:noFill/>
           </a:ln>
@@ -3339,10 +3366,8 @@
           <a:p>
             <a:pPr algn="l">
               <a:defRPr sz="1000" b="0">
-                <a:solidFill>
-                  <a:srgbClr val="666666"/>
-                </a:solidFill>
-                <a:latin typeface="Calibri"/>
+                <a:solidFill>val="69788B"/&gt;</a:solidFill>
+                <a:latin typeface="Poppins"/>
               </a:defRPr>
             </a:pPr>
             <a:r>
@@ -3375,10 +3400,8 @@
           <a:p>
             <a:pPr algn="r">
               <a:defRPr sz="1000" b="0">
-                <a:solidFill>
-                  <a:srgbClr val="666666"/>
-                </a:solidFill>
-                <a:latin typeface="Calibri"/>
+                <a:solidFill>val="69788B"/&gt;</a:solidFill>
+                <a:latin typeface="Poppins"/>
               </a:defRPr>
             </a:pPr>
             <a:r>
@@ -3411,10 +3434,8 @@
           <a:p>
             <a:pPr algn="l">
               <a:defRPr sz="2400" b="1">
-                <a:solidFill>
-                  <a:srgbClr val="B45309"/>
-                </a:solidFill>
-                <a:latin typeface="Calibri"/>
+                <a:solidFill>val="F0B429"/&gt;</a:solidFill>
+                <a:latin typeface="Poppins"/>
               </a:defRPr>
             </a:pPr>
             <a:r>
@@ -3447,10 +3468,8 @@
           <a:p>
             <a:pPr algn="l">
               <a:defRPr sz="2200" b="0">
-                <a:solidFill>
-                  <a:srgbClr val="222222"/>
-                </a:solidFill>
-                <a:latin typeface="Calibri"/>
+                <a:solidFill>val="22344A"/&gt;</a:solidFill>
+                <a:latin typeface="Poppins"/>
               </a:defRPr>
             </a:pPr>
             <a:r>
@@ -3473,9 +3492,7 @@
           <a:prstGeom prst="rect">
             <a:avLst/>
           </a:prstGeom>
-          <a:solidFill>
-            <a:srgbClr val="E8F0E9"/>
-          </a:solidFill>
+          <a:solidFill>val="F4F6F8"/&gt;</a:solidFill>
           <a:ln>
             <a:noFill/>
           </a:ln>
@@ -3526,10 +3543,8 @@
           <a:p>
             <a:pPr algn="l">
               <a:defRPr sz="1100" b="1">
-                <a:solidFill>
-                  <a:srgbClr val="2C6E49"/>
-                </a:solidFill>
-                <a:latin typeface="Calibri"/>
+                <a:solidFill>val="00875B"/&gt;</a:solidFill>
+                <a:latin typeface="Poppins"/>
               </a:defRPr>
             </a:pPr>
             <a:r>
@@ -3562,10 +3577,8 @@
           <a:p>
             <a:pPr algn="l">
               <a:defRPr sz="2000" b="0">
-                <a:solidFill>
-                  <a:srgbClr val="1A3C6E"/>
-                </a:solidFill>
-                <a:latin typeface="Calibri"/>
+                <a:solidFill>val="34495E"/&gt;</a:solidFill>
+                <a:latin typeface="Poppins"/>
               </a:defRPr>
             </a:pPr>
             <a:r>
@@ -3598,10 +3611,8 @@
           <a:p>
             <a:pPr algn="l">
               <a:defRPr sz="900" b="0">
-                <a:solidFill>
-                  <a:srgbClr val="666666"/>
-                </a:solidFill>
-                <a:latin typeface="Calibri"/>
+                <a:solidFill>val="69788B"/&gt;</a:solidFill>
+                <a:latin typeface="Poppins"/>
               </a:defRPr>
             </a:pPr>
             <a:r>
@@ -3624,9 +3635,7 @@
           <a:prstGeom prst="rect">
             <a:avLst/>
           </a:prstGeom>
-          <a:solidFill>
-            <a:srgbClr val="1A5C33"/>
-          </a:solidFill>
+          <a:solidFill>val="006847"/&gt;</a:solidFill>
           <a:ln>
             <a:noFill/>
           </a:ln>
@@ -3653,6 +3662,47 @@
           </a:p>
         </p:txBody>
       </p:sp>
+      <p:sp>
+        <p:nvSpPr>
+          <p:cNvPr id="990001" name="Pied de page FLE"/>
+          <p:cNvSpPr>
+            <a:spLocks noGrp="1"/>
+          </p:cNvSpPr>
+          <p:nvPr/>
+        </p:nvSpPr>
+        <p:spPr>
+          <a:xfrm>
+            <a:off x="4343400" y="-384048"/>
+            <a:ext cx="4572000" cy="274320"/>
+          </a:xfrm>
+          <a:prstGeom prst="rect">
+            <a:avLst/>
+          </a:prstGeom>
+        </p:spPr>
+        <p:txBody>
+          <a:bodyPr anchor="b"/>
+          <a:lstStyle/>
+          <a:p>
+            <a:pPr algn="r">
+              <a:defRPr sz="900">
+                <a:solidFill>
+                  <a:srgbClr val="9AA7B6"/>
+                </a:solidFill>
+                <a:latin typeface="Poppins"/>
+              </a:defRPr>
+            </a:pPr>
+            <a:r>
+              <a:rPr lang="fr-FR" sz="900">
+                <a:solidFill>
+                  <a:srgbClr val="9AA7B6"/>
+                </a:solidFill>
+                <a:latin typeface="Poppins"/>
+              </a:rPr>
+              <a:t>Université de Mostaganem — Dr. Madani BELACEL</a:t>
+            </a:r>
+          </a:p>
+        </p:txBody>
+      </p:sp>
     </p:spTree>
   </p:cSld>
   <p:clrMapOvr>
@@ -3666,9 +3716,7 @@
   <p:cSld>
     <p:bg>
       <p:bgPr>
-        <a:solidFill>
-          <a:srgbClr val="FFFFFF"/>
-        </a:solidFill>
+        <a:solidFill>val="FFFFFF"/&gt;</a:solidFill>
         <a:effectLst/>
       </p:bgPr>
     </p:bg>
@@ -3693,9 +3741,7 @@
           <a:prstGeom prst="rect">
             <a:avLst/>
           </a:prstGeom>
-          <a:solidFill>
-            <a:srgbClr val="2C6E49"/>
-          </a:solidFill>
+          <a:solidFill>val="00875B"/&gt;</a:solidFill>
           <a:ln>
             <a:noFill/>
           </a:ln>
@@ -3746,10 +3792,8 @@
           <a:p>
             <a:pPr algn="l">
               <a:defRPr sz="1000" b="0">
-                <a:solidFill>
-                  <a:srgbClr val="666666"/>
-                </a:solidFill>
-                <a:latin typeface="Calibri"/>
+                <a:solidFill>val="69788B"/&gt;</a:solidFill>
+                <a:latin typeface="Poppins"/>
               </a:defRPr>
             </a:pPr>
             <a:r>
@@ -3782,10 +3826,8 @@
           <a:p>
             <a:pPr algn="r">
               <a:defRPr sz="1000" b="0">
-                <a:solidFill>
-                  <a:srgbClr val="666666"/>
-                </a:solidFill>
-                <a:latin typeface="Calibri"/>
+                <a:solidFill>val="69788B"/&gt;</a:solidFill>
+                <a:latin typeface="Poppins"/>
               </a:defRPr>
             </a:pPr>
             <a:r>
@@ -3818,10 +3860,8 @@
           <a:p>
             <a:pPr algn="l">
               <a:defRPr sz="2400" b="1">
-                <a:solidFill>
-                  <a:srgbClr val="B45309"/>
-                </a:solidFill>
-                <a:latin typeface="Calibri"/>
+                <a:solidFill>val="F0B429"/&gt;</a:solidFill>
+                <a:latin typeface="Poppins"/>
               </a:defRPr>
             </a:pPr>
             <a:r>
@@ -3854,10 +3894,8 @@
           <a:p>
             <a:pPr algn="l">
               <a:defRPr sz="2200" b="0">
-                <a:solidFill>
-                  <a:srgbClr val="222222"/>
-                </a:solidFill>
-                <a:latin typeface="Calibri"/>
+                <a:solidFill>val="22344A"/&gt;</a:solidFill>
+                <a:latin typeface="Poppins"/>
               </a:defRPr>
             </a:pPr>
             <a:r>
@@ -3880,9 +3918,7 @@
           <a:prstGeom prst="rect">
             <a:avLst/>
           </a:prstGeom>
-          <a:solidFill>
-            <a:srgbClr val="E8F0E9"/>
-          </a:solidFill>
+          <a:solidFill>val="F4F6F8"/&gt;</a:solidFill>
           <a:ln>
             <a:noFill/>
           </a:ln>
@@ -3933,10 +3969,8 @@
           <a:p>
             <a:pPr algn="l">
               <a:defRPr sz="1100" b="1">
-                <a:solidFill>
-                  <a:srgbClr val="2C6E49"/>
-                </a:solidFill>
-                <a:latin typeface="Calibri"/>
+                <a:solidFill>val="00875B"/&gt;</a:solidFill>
+                <a:latin typeface="Poppins"/>
               </a:defRPr>
             </a:pPr>
             <a:r>
@@ -3969,10 +4003,8 @@
           <a:p>
             <a:pPr algn="l">
               <a:defRPr sz="2000" b="0">
-                <a:solidFill>
-                  <a:srgbClr val="1A3C6E"/>
-                </a:solidFill>
-                <a:latin typeface="Calibri"/>
+                <a:solidFill>val="34495E"/&gt;</a:solidFill>
+                <a:latin typeface="Poppins"/>
               </a:defRPr>
             </a:pPr>
             <a:r>
@@ -4005,10 +4037,8 @@
           <a:p>
             <a:pPr algn="l">
               <a:defRPr sz="900" b="0">
-                <a:solidFill>
-                  <a:srgbClr val="666666"/>
-                </a:solidFill>
-                <a:latin typeface="Calibri"/>
+                <a:solidFill>val="69788B"/&gt;</a:solidFill>
+                <a:latin typeface="Poppins"/>
               </a:defRPr>
             </a:pPr>
             <a:r>
@@ -4031,9 +4061,7 @@
           <a:prstGeom prst="rect">
             <a:avLst/>
           </a:prstGeom>
-          <a:solidFill>
-            <a:srgbClr val="1A5C33"/>
-          </a:solidFill>
+          <a:solidFill>val="006847"/&gt;</a:solidFill>
           <a:ln>
             <a:noFill/>
           </a:ln>
@@ -4060,6 +4088,47 @@
           </a:p>
         </p:txBody>
       </p:sp>
+      <p:sp>
+        <p:nvSpPr>
+          <p:cNvPr id="990001" name="Pied de page FLE"/>
+          <p:cNvSpPr>
+            <a:spLocks noGrp="1"/>
+          </p:cNvSpPr>
+          <p:nvPr/>
+        </p:nvSpPr>
+        <p:spPr>
+          <a:xfrm>
+            <a:off x="4343400" y="-384048"/>
+            <a:ext cx="4572000" cy="274320"/>
+          </a:xfrm>
+          <a:prstGeom prst="rect">
+            <a:avLst/>
+          </a:prstGeom>
+        </p:spPr>
+        <p:txBody>
+          <a:bodyPr anchor="b"/>
+          <a:lstStyle/>
+          <a:p>
+            <a:pPr algn="r">
+              <a:defRPr sz="900">
+                <a:solidFill>
+                  <a:srgbClr val="9AA7B6"/>
+                </a:solidFill>
+                <a:latin typeface="Poppins"/>
+              </a:defRPr>
+            </a:pPr>
+            <a:r>
+              <a:rPr lang="fr-FR" sz="900">
+                <a:solidFill>
+                  <a:srgbClr val="9AA7B6"/>
+                </a:solidFill>
+                <a:latin typeface="Poppins"/>
+              </a:rPr>
+              <a:t>Université de Mostaganem — Dr. Madani BELACEL</a:t>
+            </a:r>
+          </a:p>
+        </p:txBody>
+      </p:sp>
     </p:spTree>
   </p:cSld>
   <p:clrMapOvr>
@@ -4073,9 +4142,7 @@
   <p:cSld>
     <p:bg>
       <p:bgPr>
-        <a:solidFill>
-          <a:srgbClr val="FFFFFF"/>
-        </a:solidFill>
+        <a:solidFill>val="FFFFFF"/&gt;</a:solidFill>
         <a:effectLst/>
       </p:bgPr>
     </p:bg>
@@ -4100,9 +4167,7 @@
           <a:prstGeom prst="rect">
             <a:avLst/>
           </a:prstGeom>
-          <a:solidFill>
-            <a:srgbClr val="2C6E49"/>
-          </a:solidFill>
+          <a:solidFill>val="00875B"/&gt;</a:solidFill>
           <a:ln>
             <a:noFill/>
           </a:ln>
@@ -4153,10 +4218,8 @@
           <a:p>
             <a:pPr algn="l">
               <a:defRPr sz="1000" b="0">
-                <a:solidFill>
-                  <a:srgbClr val="666666"/>
-                </a:solidFill>
-                <a:latin typeface="Calibri"/>
+                <a:solidFill>val="69788B"/&gt;</a:solidFill>
+                <a:latin typeface="Poppins"/>
               </a:defRPr>
             </a:pPr>
             <a:r>
@@ -4189,10 +4252,8 @@
           <a:p>
             <a:pPr algn="r">
               <a:defRPr sz="1000" b="0">
-                <a:solidFill>
-                  <a:srgbClr val="666666"/>
-                </a:solidFill>
-                <a:latin typeface="Calibri"/>
+                <a:solidFill>val="69788B"/&gt;</a:solidFill>
+                <a:latin typeface="Poppins"/>
               </a:defRPr>
             </a:pPr>
             <a:r>
@@ -4225,10 +4286,8 @@
           <a:p>
             <a:pPr algn="l">
               <a:defRPr sz="2400" b="1">
-                <a:solidFill>
-                  <a:srgbClr val="B45309"/>
-                </a:solidFill>
-                <a:latin typeface="Calibri"/>
+                <a:solidFill>val="F0B429"/&gt;</a:solidFill>
+                <a:latin typeface="Poppins"/>
               </a:defRPr>
             </a:pPr>
             <a:r>
@@ -4261,10 +4320,8 @@
           <a:p>
             <a:pPr algn="l">
               <a:defRPr sz="2200" b="0">
-                <a:solidFill>
-                  <a:srgbClr val="222222"/>
-                </a:solidFill>
-                <a:latin typeface="Calibri"/>
+                <a:solidFill>val="22344A"/&gt;</a:solidFill>
+                <a:latin typeface="Poppins"/>
               </a:defRPr>
             </a:pPr>
             <a:r>
@@ -4287,9 +4344,7 @@
           <a:prstGeom prst="rect">
             <a:avLst/>
           </a:prstGeom>
-          <a:solidFill>
-            <a:srgbClr val="E8F0E9"/>
-          </a:solidFill>
+          <a:solidFill>val="F4F6F8"/&gt;</a:solidFill>
           <a:ln>
             <a:noFill/>
           </a:ln>
@@ -4340,10 +4395,8 @@
           <a:p>
             <a:pPr algn="l">
               <a:defRPr sz="1100" b="1">
-                <a:solidFill>
-                  <a:srgbClr val="2C6E49"/>
-                </a:solidFill>
-                <a:latin typeface="Calibri"/>
+                <a:solidFill>val="00875B"/&gt;</a:solidFill>
+                <a:latin typeface="Poppins"/>
               </a:defRPr>
             </a:pPr>
             <a:r>
@@ -4376,10 +4429,8 @@
           <a:p>
             <a:pPr algn="l">
               <a:defRPr sz="2000" b="0">
-                <a:solidFill>
-                  <a:srgbClr val="1A3C6E"/>
-                </a:solidFill>
-                <a:latin typeface="Calibri"/>
+                <a:solidFill>val="34495E"/&gt;</a:solidFill>
+                <a:latin typeface="Poppins"/>
               </a:defRPr>
             </a:pPr>
             <a:r>
@@ -4412,10 +4463,8 @@
           <a:p>
             <a:pPr algn="l">
               <a:defRPr sz="900" b="0">
-                <a:solidFill>
-                  <a:srgbClr val="666666"/>
-                </a:solidFill>
-                <a:latin typeface="Calibri"/>
+                <a:solidFill>val="69788B"/&gt;</a:solidFill>
+                <a:latin typeface="Poppins"/>
               </a:defRPr>
             </a:pPr>
             <a:r>
@@ -4438,9 +4487,7 @@
           <a:prstGeom prst="rect">
             <a:avLst/>
           </a:prstGeom>
-          <a:solidFill>
-            <a:srgbClr val="1A5C33"/>
-          </a:solidFill>
+          <a:solidFill>val="006847"/&gt;</a:solidFill>
           <a:ln>
             <a:noFill/>
           </a:ln>
@@ -4467,6 +4514,47 @@
           </a:p>
         </p:txBody>
       </p:sp>
+      <p:sp>
+        <p:nvSpPr>
+          <p:cNvPr id="990001" name="Pied de page FLE"/>
+          <p:cNvSpPr>
+            <a:spLocks noGrp="1"/>
+          </p:cNvSpPr>
+          <p:nvPr/>
+        </p:nvSpPr>
+        <p:spPr>
+          <a:xfrm>
+            <a:off x="4343400" y="-384048"/>
+            <a:ext cx="4572000" cy="274320"/>
+          </a:xfrm>
+          <a:prstGeom prst="rect">
+            <a:avLst/>
+          </a:prstGeom>
+        </p:spPr>
+        <p:txBody>
+          <a:bodyPr anchor="b"/>
+          <a:lstStyle/>
+          <a:p>
+            <a:pPr algn="r">
+              <a:defRPr sz="900">
+                <a:solidFill>
+                  <a:srgbClr val="9AA7B6"/>
+                </a:solidFill>
+                <a:latin typeface="Poppins"/>
+              </a:defRPr>
+            </a:pPr>
+            <a:r>
+              <a:rPr lang="fr-FR" sz="900">
+                <a:solidFill>
+                  <a:srgbClr val="9AA7B6"/>
+                </a:solidFill>
+                <a:latin typeface="Poppins"/>
+              </a:rPr>
+              <a:t>Université de Mostaganem — Dr. Madani BELACEL</a:t>
+            </a:r>
+          </a:p>
+        </p:txBody>
+      </p:sp>
     </p:spTree>
   </p:cSld>
   <p:clrMapOvr>
@@ -4480,9 +4568,7 @@
   <p:cSld>
     <p:bg>
       <p:bgPr>
-        <a:solidFill>
-          <a:srgbClr val="FFFFFF"/>
-        </a:solidFill>
+        <a:solidFill>val="FFFFFF"/&gt;</a:solidFill>
         <a:effectLst/>
       </p:bgPr>
     </p:bg>
@@ -4507,9 +4593,7 @@
           <a:prstGeom prst="rect">
             <a:avLst/>
           </a:prstGeom>
-          <a:solidFill>
-            <a:srgbClr val="2C6E49"/>
-          </a:solidFill>
+          <a:solidFill>val="00875B"/&gt;</a:solidFill>
           <a:ln>
             <a:noFill/>
           </a:ln>
@@ -4560,10 +4644,8 @@
           <a:p>
             <a:pPr algn="l">
               <a:defRPr sz="1000" b="0">
-                <a:solidFill>
-                  <a:srgbClr val="666666"/>
-                </a:solidFill>
-                <a:latin typeface="Calibri"/>
+                <a:solidFill>val="69788B"/&gt;</a:solidFill>
+                <a:latin typeface="Poppins"/>
               </a:defRPr>
             </a:pPr>
             <a:r>
@@ -4596,10 +4678,8 @@
           <a:p>
             <a:pPr algn="r">
               <a:defRPr sz="1000" b="0">
-                <a:solidFill>
-                  <a:srgbClr val="666666"/>
-                </a:solidFill>
-                <a:latin typeface="Calibri"/>
+                <a:solidFill>val="69788B"/&gt;</a:solidFill>
+                <a:latin typeface="Poppins"/>
               </a:defRPr>
             </a:pPr>
             <a:r>
@@ -4632,10 +4712,8 @@
           <a:p>
             <a:pPr algn="l">
               <a:defRPr sz="2400" b="1">
-                <a:solidFill>
-                  <a:srgbClr val="B45309"/>
-                </a:solidFill>
-                <a:latin typeface="Calibri"/>
+                <a:solidFill>val="F0B429"/&gt;</a:solidFill>
+                <a:latin typeface="Poppins"/>
               </a:defRPr>
             </a:pPr>
             <a:r>
@@ -4668,10 +4746,8 @@
           <a:p>
             <a:pPr algn="l">
               <a:defRPr sz="2200" b="0">
-                <a:solidFill>
-                  <a:srgbClr val="222222"/>
-                </a:solidFill>
-                <a:latin typeface="Calibri"/>
+                <a:solidFill>val="22344A"/&gt;</a:solidFill>
+                <a:latin typeface="Poppins"/>
               </a:defRPr>
             </a:pPr>
             <a:r>
@@ -4694,9 +4770,7 @@
           <a:prstGeom prst="rect">
             <a:avLst/>
           </a:prstGeom>
-          <a:solidFill>
-            <a:srgbClr val="E8F0E9"/>
-          </a:solidFill>
+          <a:solidFill>val="F4F6F8"/&gt;</a:solidFill>
           <a:ln>
             <a:noFill/>
           </a:ln>
@@ -4747,10 +4821,8 @@
           <a:p>
             <a:pPr algn="l">
               <a:defRPr sz="1100" b="1">
-                <a:solidFill>
-                  <a:srgbClr val="2C6E49"/>
-                </a:solidFill>
-                <a:latin typeface="Calibri"/>
+                <a:solidFill>val="00875B"/&gt;</a:solidFill>
+                <a:latin typeface="Poppins"/>
               </a:defRPr>
             </a:pPr>
             <a:r>
@@ -4783,10 +4855,8 @@
           <a:p>
             <a:pPr algn="l">
               <a:defRPr sz="2000" b="0">
-                <a:solidFill>
-                  <a:srgbClr val="1A3C6E"/>
-                </a:solidFill>
-                <a:latin typeface="Calibri"/>
+                <a:solidFill>val="34495E"/&gt;</a:solidFill>
+                <a:latin typeface="Poppins"/>
               </a:defRPr>
             </a:pPr>
             <a:r>
@@ -4819,10 +4889,8 @@
           <a:p>
             <a:pPr algn="l">
               <a:defRPr sz="900" b="0">
-                <a:solidFill>
-                  <a:srgbClr val="666666"/>
-                </a:solidFill>
-                <a:latin typeface="Calibri"/>
+                <a:solidFill>val="69788B"/&gt;</a:solidFill>
+                <a:latin typeface="Poppins"/>
               </a:defRPr>
             </a:pPr>
             <a:r>
@@ -4845,9 +4913,7 @@
           <a:prstGeom prst="rect">
             <a:avLst/>
           </a:prstGeom>
-          <a:solidFill>
-            <a:srgbClr val="1A5C33"/>
-          </a:solidFill>
+          <a:solidFill>val="006847"/&gt;</a:solidFill>
           <a:ln>
             <a:noFill/>
           </a:ln>
@@ -4874,6 +4940,47 @@
           </a:p>
         </p:txBody>
       </p:sp>
+      <p:sp>
+        <p:nvSpPr>
+          <p:cNvPr id="990001" name="Pied de page FLE"/>
+          <p:cNvSpPr>
+            <a:spLocks noGrp="1"/>
+          </p:cNvSpPr>
+          <p:nvPr/>
+        </p:nvSpPr>
+        <p:spPr>
+          <a:xfrm>
+            <a:off x="4343400" y="-384048"/>
+            <a:ext cx="4572000" cy="274320"/>
+          </a:xfrm>
+          <a:prstGeom prst="rect">
+            <a:avLst/>
+          </a:prstGeom>
+        </p:spPr>
+        <p:txBody>
+          <a:bodyPr anchor="b"/>
+          <a:lstStyle/>
+          <a:p>
+            <a:pPr algn="r">
+              <a:defRPr sz="900">
+                <a:solidFill>
+                  <a:srgbClr val="9AA7B6"/>
+                </a:solidFill>
+                <a:latin typeface="Poppins"/>
+              </a:defRPr>
+            </a:pPr>
+            <a:r>
+              <a:rPr lang="fr-FR" sz="900">
+                <a:solidFill>
+                  <a:srgbClr val="9AA7B6"/>
+                </a:solidFill>
+                <a:latin typeface="Poppins"/>
+              </a:rPr>
+              <a:t>Université de Mostaganem — Dr. Madani BELACEL</a:t>
+            </a:r>
+          </a:p>
+        </p:txBody>
+      </p:sp>
     </p:spTree>
   </p:cSld>
   <p:clrMapOvr>
@@ -4887,9 +4994,7 @@
   <p:cSld>
     <p:bg>
       <p:bgPr>
-        <a:solidFill>
-          <a:srgbClr val="FFFFFF"/>
-        </a:solidFill>
+        <a:solidFill>val="FFFFFF"/&gt;</a:solidFill>
         <a:effectLst/>
       </p:bgPr>
     </p:bg>
@@ -4914,9 +5019,7 @@
           <a:prstGeom prst="rect">
             <a:avLst/>
           </a:prstGeom>
-          <a:solidFill>
-            <a:srgbClr val="2C6E49"/>
-          </a:solidFill>
+          <a:solidFill>val="00875B"/&gt;</a:solidFill>
           <a:ln>
             <a:noFill/>
           </a:ln>
@@ -4967,10 +5070,8 @@
           <a:p>
             <a:pPr algn="l">
               <a:defRPr sz="1000" b="0">
-                <a:solidFill>
-                  <a:srgbClr val="666666"/>
-                </a:solidFill>
-                <a:latin typeface="Calibri"/>
+                <a:solidFill>val="69788B"/&gt;</a:solidFill>
+                <a:latin typeface="Poppins"/>
               </a:defRPr>
             </a:pPr>
             <a:r>
@@ -5003,10 +5104,8 @@
           <a:p>
             <a:pPr algn="r">
               <a:defRPr sz="1000" b="0">
-                <a:solidFill>
-                  <a:srgbClr val="666666"/>
-                </a:solidFill>
-                <a:latin typeface="Calibri"/>
+                <a:solidFill>val="69788B"/&gt;</a:solidFill>
+                <a:latin typeface="Poppins"/>
               </a:defRPr>
             </a:pPr>
             <a:r>
@@ -5039,10 +5138,8 @@
           <a:p>
             <a:pPr algn="l">
               <a:defRPr sz="2400" b="1">
-                <a:solidFill>
-                  <a:srgbClr val="B45309"/>
-                </a:solidFill>
-                <a:latin typeface="Calibri"/>
+                <a:solidFill>val="F0B429"/&gt;</a:solidFill>
+                <a:latin typeface="Poppins"/>
               </a:defRPr>
             </a:pPr>
             <a:r>
@@ -5075,10 +5172,8 @@
           <a:p>
             <a:pPr algn="l">
               <a:defRPr sz="2200" b="0">
-                <a:solidFill>
-                  <a:srgbClr val="222222"/>
-                </a:solidFill>
-                <a:latin typeface="Calibri"/>
+                <a:solidFill>val="22344A"/&gt;</a:solidFill>
+                <a:latin typeface="Poppins"/>
               </a:defRPr>
             </a:pPr>
             <a:r>
@@ -5101,9 +5196,7 @@
           <a:prstGeom prst="rect">
             <a:avLst/>
           </a:prstGeom>
-          <a:solidFill>
-            <a:srgbClr val="E8F0E9"/>
-          </a:solidFill>
+          <a:solidFill>val="F4F6F8"/&gt;</a:solidFill>
           <a:ln>
             <a:noFill/>
           </a:ln>
@@ -5154,10 +5247,8 @@
           <a:p>
             <a:pPr algn="l">
               <a:defRPr sz="1100" b="1">
-                <a:solidFill>
-                  <a:srgbClr val="2C6E49"/>
-                </a:solidFill>
-                <a:latin typeface="Calibri"/>
+                <a:solidFill>val="00875B"/&gt;</a:solidFill>
+                <a:latin typeface="Poppins"/>
               </a:defRPr>
             </a:pPr>
             <a:r>
@@ -5190,10 +5281,8 @@
           <a:p>
             <a:pPr algn="l">
               <a:defRPr sz="2000" b="0">
-                <a:solidFill>
-                  <a:srgbClr val="1A3C6E"/>
-                </a:solidFill>
-                <a:latin typeface="Calibri"/>
+                <a:solidFill>val="34495E"/&gt;</a:solidFill>
+                <a:latin typeface="Poppins"/>
               </a:defRPr>
             </a:pPr>
             <a:r>
@@ -5226,10 +5315,8 @@
           <a:p>
             <a:pPr algn="l">
               <a:defRPr sz="900" b="0">
-                <a:solidFill>
-                  <a:srgbClr val="666666"/>
-                </a:solidFill>
-                <a:latin typeface="Calibri"/>
+                <a:solidFill>val="69788B"/&gt;</a:solidFill>
+                <a:latin typeface="Poppins"/>
               </a:defRPr>
             </a:pPr>
             <a:r>
@@ -5252,9 +5339,7 @@
           <a:prstGeom prst="rect">
             <a:avLst/>
           </a:prstGeom>
-          <a:solidFill>
-            <a:srgbClr val="1A5C33"/>
-          </a:solidFill>
+          <a:solidFill>val="006847"/&gt;</a:solidFill>
           <a:ln>
             <a:noFill/>
           </a:ln>
@@ -5281,6 +5366,47 @@
           </a:p>
         </p:txBody>
       </p:sp>
+      <p:sp>
+        <p:nvSpPr>
+          <p:cNvPr id="990001" name="Pied de page FLE"/>
+          <p:cNvSpPr>
+            <a:spLocks noGrp="1"/>
+          </p:cNvSpPr>
+          <p:nvPr/>
+        </p:nvSpPr>
+        <p:spPr>
+          <a:xfrm>
+            <a:off x="4343400" y="-384048"/>
+            <a:ext cx="4572000" cy="274320"/>
+          </a:xfrm>
+          <a:prstGeom prst="rect">
+            <a:avLst/>
+          </a:prstGeom>
+        </p:spPr>
+        <p:txBody>
+          <a:bodyPr anchor="b"/>
+          <a:lstStyle/>
+          <a:p>
+            <a:pPr algn="r">
+              <a:defRPr sz="900">
+                <a:solidFill>
+                  <a:srgbClr val="9AA7B6"/>
+                </a:solidFill>
+                <a:latin typeface="Poppins"/>
+              </a:defRPr>
+            </a:pPr>
+            <a:r>
+              <a:rPr lang="fr-FR" sz="900">
+                <a:solidFill>
+                  <a:srgbClr val="9AA7B6"/>
+                </a:solidFill>
+                <a:latin typeface="Poppins"/>
+              </a:rPr>
+              <a:t>Université de Mostaganem — Dr. Madani BELACEL</a:t>
+            </a:r>
+          </a:p>
+        </p:txBody>
+      </p:sp>
     </p:spTree>
   </p:cSld>
   <p:clrMapOvr>
@@ -5294,9 +5420,7 @@
   <p:cSld>
     <p:bg>
       <p:bgPr>
-        <a:solidFill>
-          <a:srgbClr val="FFFFFF"/>
-        </a:solidFill>
+        <a:solidFill>val="FFFFFF"/&gt;</a:solidFill>
         <a:effectLst/>
       </p:bgPr>
     </p:bg>
@@ -5321,9 +5445,7 @@
           <a:prstGeom prst="rect">
             <a:avLst/>
           </a:prstGeom>
-          <a:solidFill>
-            <a:srgbClr val="2C6E49"/>
-          </a:solidFill>
+          <a:solidFill>val="00875B"/&gt;</a:solidFill>
           <a:ln>
             <a:noFill/>
           </a:ln>
@@ -5374,10 +5496,8 @@
           <a:p>
             <a:pPr algn="l">
               <a:defRPr sz="1000" b="0">
-                <a:solidFill>
-                  <a:srgbClr val="666666"/>
-                </a:solidFill>
-                <a:latin typeface="Calibri"/>
+                <a:solidFill>val="69788B"/&gt;</a:solidFill>
+                <a:latin typeface="Poppins"/>
               </a:defRPr>
             </a:pPr>
             <a:r>
@@ -5410,10 +5530,8 @@
           <a:p>
             <a:pPr algn="r">
               <a:defRPr sz="1000" b="0">
-                <a:solidFill>
-                  <a:srgbClr val="666666"/>
-                </a:solidFill>
-                <a:latin typeface="Calibri"/>
+                <a:solidFill>val="69788B"/&gt;</a:solidFill>
+                <a:latin typeface="Poppins"/>
               </a:defRPr>
             </a:pPr>
             <a:r>
@@ -5446,10 +5564,8 @@
           <a:p>
             <a:pPr algn="l">
               <a:defRPr sz="2400" b="1">
-                <a:solidFill>
-                  <a:srgbClr val="B45309"/>
-                </a:solidFill>
-                <a:latin typeface="Calibri"/>
+                <a:solidFill>val="F0B429"/&gt;</a:solidFill>
+                <a:latin typeface="Poppins"/>
               </a:defRPr>
             </a:pPr>
             <a:r>
@@ -5482,10 +5598,8 @@
           <a:p>
             <a:pPr algn="l">
               <a:defRPr sz="2200" b="0">
-                <a:solidFill>
-                  <a:srgbClr val="222222"/>
-                </a:solidFill>
-                <a:latin typeface="Calibri"/>
+                <a:solidFill>val="22344A"/&gt;</a:solidFill>
+                <a:latin typeface="Poppins"/>
               </a:defRPr>
             </a:pPr>
             <a:r>
@@ -5508,9 +5622,7 @@
           <a:prstGeom prst="rect">
             <a:avLst/>
           </a:prstGeom>
-          <a:solidFill>
-            <a:srgbClr val="E8F0E9"/>
-          </a:solidFill>
+          <a:solidFill>val="F4F6F8"/&gt;</a:solidFill>
           <a:ln>
             <a:noFill/>
           </a:ln>
@@ -5561,10 +5673,8 @@
           <a:p>
             <a:pPr algn="l">
               <a:defRPr sz="1100" b="1">
-                <a:solidFill>
-                  <a:srgbClr val="2C6E49"/>
-                </a:solidFill>
-                <a:latin typeface="Calibri"/>
+                <a:solidFill>val="00875B"/&gt;</a:solidFill>
+                <a:latin typeface="Poppins"/>
               </a:defRPr>
             </a:pPr>
             <a:r>
@@ -5597,10 +5707,8 @@
           <a:p>
             <a:pPr algn="l">
               <a:defRPr sz="2000" b="0">
-                <a:solidFill>
-                  <a:srgbClr val="1A3C6E"/>
-                </a:solidFill>
-                <a:latin typeface="Calibri"/>
+                <a:solidFill>val="34495E"/&gt;</a:solidFill>
+                <a:latin typeface="Poppins"/>
               </a:defRPr>
             </a:pPr>
             <a:r>
@@ -5633,10 +5741,8 @@
           <a:p>
             <a:pPr algn="l">
               <a:defRPr sz="900" b="0">
-                <a:solidFill>
-                  <a:srgbClr val="666666"/>
-                </a:solidFill>
-                <a:latin typeface="Calibri"/>
+                <a:solidFill>val="69788B"/&gt;</a:solidFill>
+                <a:latin typeface="Poppins"/>
               </a:defRPr>
             </a:pPr>
             <a:r>
@@ -5659,9 +5765,7 @@
           <a:prstGeom prst="rect">
             <a:avLst/>
           </a:prstGeom>
-          <a:solidFill>
-            <a:srgbClr val="1A5C33"/>
-          </a:solidFill>
+          <a:solidFill>val="006847"/&gt;</a:solidFill>
           <a:ln>
             <a:noFill/>
           </a:ln>
@@ -5685,6 +5789,47 @@
           <a:lstStyle/>
           <a:p>
             <a:pPr algn="ctr"/>
+          </a:p>
+        </p:txBody>
+      </p:sp>
+      <p:sp>
+        <p:nvSpPr>
+          <p:cNvPr id="990001" name="Pied de page FLE"/>
+          <p:cNvSpPr>
+            <a:spLocks noGrp="1"/>
+          </p:cNvSpPr>
+          <p:nvPr/>
+        </p:nvSpPr>
+        <p:spPr>
+          <a:xfrm>
+            <a:off x="4343400" y="-384048"/>
+            <a:ext cx="4572000" cy="274320"/>
+          </a:xfrm>
+          <a:prstGeom prst="rect">
+            <a:avLst/>
+          </a:prstGeom>
+        </p:spPr>
+        <p:txBody>
+          <a:bodyPr anchor="b"/>
+          <a:lstStyle/>
+          <a:p>
+            <a:pPr algn="r">
+              <a:defRPr sz="900">
+                <a:solidFill>
+                  <a:srgbClr val="9AA7B6"/>
+                </a:solidFill>
+                <a:latin typeface="Poppins"/>
+              </a:defRPr>
+            </a:pPr>
+            <a:r>
+              <a:rPr lang="fr-FR" sz="900">
+                <a:solidFill>
+                  <a:srgbClr val="9AA7B6"/>
+                </a:solidFill>
+                <a:latin typeface="Poppins"/>
+              </a:rPr>
+              <a:t>Université de Mostaganem — Dr. Madani BELACEL</a:t>
+            </a:r>
           </a:p>
         </p:txBody>
       </p:sp>
@@ -5739,7 +5884,7 @@
     </a:clrScheme>
     <a:fontScheme name="Office">
       <a:majorFont>
-        <a:latin typeface="Calibri"/>
+        <a:latin typeface="Poppins"/>
         <a:ea typeface=""/>
         <a:cs typeface=""/>
         <a:font script="Jpan" typeface="ＭＳ Ｐゴシック"/>
@@ -5774,7 +5919,7 @@
         <a:font script="Geor" typeface="Sylfaen"/>
       </a:majorFont>
       <a:minorFont>
-        <a:latin typeface="Calibri"/>
+        <a:latin typeface="Poppins"/>
         <a:ea typeface=""/>
         <a:cs typeface=""/>
         <a:font script="Jpan" typeface="ＭＳ Ｐゴシック"/>
